--- a/dist/초5/국어/토의와논리적표현/초5_국어_토의와논리적표현_03_주장하는글쓰기.pptx
+++ b/dist/초5/국어/토의와논리적표현/초5_국어_토의와논리적표현_03_주장하는글쓰기.pptx
@@ -121,13 +121,13 @@
   <p:extLst>
     <p:ext uri="{521415D9-36F7-43E2-AB2F-B90AF26B5E84}">
       <p14:sectionLst xmlns:p14="http://schemas.microsoft.com/office/powerpoint/2010/main">
-        <p14:section name="도입" id="{cfad3118-ba09-a4ad-6ca0-86cda09fd94b}">
+        <p14:section name="도입" id="{aa145e3f-c7cf-8117-f912-8144e3f3e8ad}">
           <p14:sldIdLst>
             <p14:sldId id="256"/>
             <p14:sldId id="257"/>
           </p14:sldIdLst>
         </p14:section>
-        <p14:section name="개념" id="{84384cd1-f130-63a9-f2b8-3d3004402208}">
+        <p14:section name="개념" id="{83c06599-7b9a-a954-adc4-8a90d562add3}">
           <p14:sldIdLst>
             <p14:sldId id="258"/>
             <p14:sldId id="259"/>
@@ -136,26 +136,26 @@
             <p14:sldId id="262"/>
           </p14:sldIdLst>
         </p14:section>
-        <p14:section name="연습" id="{0671c1f5-dac6-625b-aca2-bcf156ab26c8}">
+        <p14:section name="연습" id="{094fa145-e2de-cb65-66d9-3db8889008ee}">
           <p14:sldIdLst>
             <p14:sldId id="263"/>
             <p14:sldId id="264"/>
             <p14:sldId id="265"/>
           </p14:sldIdLst>
         </p14:section>
-        <p14:section name="확인" id="{ff7f3499-3d53-ba93-30b8-c831855b413d}">
+        <p14:section name="확인" id="{3fd0eea6-0550-fe8f-3b96-b8788b20c788}">
           <p14:sldIdLst>
             <p14:sldId id="266"/>
             <p14:sldId id="267"/>
             <p14:sldId id="268"/>
           </p14:sldIdLst>
         </p14:section>
-        <p14:section name="정리" id="{d2e62cbc-5a4e-d92a-9606-3380c430b229}">
+        <p14:section name="정리" id="{8526ec21-d516-a346-4584-126f2b5828a6}">
           <p14:sldIdLst>
             <p14:sldId id="269"/>
           </p14:sldIdLst>
         </p14:section>
-        <p14:section name="보충" id="{f4fee29f-9b84-857f-d2dc-42eeeeee1155}">
+        <p14:section name="보충" id="{641ea3ef-54a1-81be-24ad-92dc950cac50}">
           <p14:sldIdLst>
             <p14:sldId id="270"/>
           </p14:sldIdLst>
@@ -8531,7 +8531,7 @@
           </p:nvPr>
         </p:nvGraphicFramePr>
         <p:xfrm>
-          <a:off x="836676" y="2148840"/>
+          <a:off x="836676" y="2121408"/>
           <a:ext cx="10515600" cy="914400"/>
         </p:xfrm>
         <a:graphic>
@@ -8543,7 +8543,7 @@
                 <a:gridCol w="2313432"/>
                 <a:gridCol w="6729984"/>
               </a:tblGrid>
-              <a:tr h="472440">
+              <a:tr h="481584">
                 <a:tc>
                   <a:txBody>
                     <a:bodyPr/>
@@ -8749,7 +8749,7 @@
                   </a:tcPr>
                 </a:tc>
               </a:tr>
-              <a:tr h="472440">
+              <a:tr h="481584">
                 <a:tc>
                   <a:txBody>
                     <a:bodyPr/>
@@ -8955,7 +8955,7 @@
                   </a:tcPr>
                 </a:tc>
               </a:tr>
-              <a:tr h="472440">
+              <a:tr h="481584">
                 <a:tc>
                   <a:txBody>
                     <a:bodyPr/>
@@ -9161,7 +9161,7 @@
                   </a:tcPr>
                 </a:tc>
               </a:tr>
-              <a:tr h="472440">
+              <a:tr h="481584">
                 <a:tc>
                   <a:txBody>
                     <a:bodyPr/>
@@ -9367,7 +9367,7 @@
                   </a:tcPr>
                 </a:tc>
               </a:tr>
-              <a:tr h="472440">
+              <a:tr h="481584">
                 <a:tc>
                   <a:txBody>
                     <a:bodyPr/>
@@ -9573,7 +9573,7 @@
                   </a:tcPr>
                 </a:tc>
               </a:tr>
-              <a:tr h="472440">
+              <a:tr h="481584">
                 <a:tc>
                   <a:txBody>
                     <a:bodyPr/>
